--- a/오늘뭐라카드라_포트폴리오.pptx
+++ b/오늘뭐라카드라_포트폴리오.pptx
@@ -12618,6 +12618,7 @@
                 <a:ea typeface="Arial"/>
                 <a:cs typeface="Arial"/>
                 <a:sym typeface="Arial"/>
+                <a:hlinkClick r:id="rId4"/>
               </a:rPr>
               <a:t>깃허브 링크 : https://github.com/jiwoo8830/PickUpCard</a:t>
             </a:r>
@@ -12724,6 +12725,7 @@
                 <a:ea typeface="Arial"/>
                 <a:cs typeface="Arial"/>
                 <a:sym typeface="Arial"/>
+                <a:hlinkClick r:id="rId5"/>
               </a:rPr>
               <a:t>서비스 링크 : https://jiwoo8830.github.io/PickUpCard/</a:t>
             </a:r>
